--- a/downloads/DCT_V1_Ch05_Slides.pptx
+++ b/downloads/DCT_V1_Ch05_Slides.pptx
@@ -130,7 +130,7 @@
   <p:extLst>
     <p:ext uri="{521415D9-36F7-43E2-AB2F-B90AF26B5E84}">
       <p14:sectionLst xmlns:p14="http://schemas.microsoft.com/office/powerpoint/2010/main">
-        <p14:section name="Opening" id="{1b2180a5-53fd-19ee-20b9-1cc90c8550e8}">
+        <p14:section name="Opening" id="{949eb8d2-e960-e215-a3cb-8aba50249e7e}">
           <p14:sldIdLst>
             <p14:sldId id="256"/>
             <p14:sldId id="257"/>
@@ -138,50 +138,50 @@
             <p14:sldId id="259"/>
           </p14:sldIdLst>
         </p14:section>
-        <p14:section name="5.1 Why the State Needs a Foundation" id="{8046b14a-8903-31f2-e1e6-d4c8760b9c01}">
+        <p14:section name="5.1 Why the State Needs a Foundation" id="{89e5b88b-5662-1d94-0044-527ceb5a2e73}">
           <p14:sldIdLst>
             <p14:sldId id="260"/>
           </p14:sldIdLst>
         </p14:section>
-        <p14:section name="5.2 The Minimal State" id="{a8670cf1-2a2e-30e3-8b47-b8e3fe458912}">
+        <p14:section name="5.2 The Minimal State" id="{96327524-193c-02b7-346d-552e789d49cd}">
           <p14:sldIdLst>
             <p14:sldId id="261"/>
           </p14:sldIdLst>
         </p14:section>
-        <p14:section name="5.3 State Variables and Parameters" id="{86d010b3-bfe6-b817-80ab-1185026abefa}">
+        <p14:section name="5.3 State Variables and Parameters" id="{9f4c1081-7e29-f4ec-b6ab-ef43f3fff9df}">
           <p14:sldIdLst>
             <p14:sldId id="262"/>
             <p14:sldId id="263"/>
           </p14:sldIdLst>
         </p14:section>
-        <p14:section name="5.4 State Spaces and Configurations" id="{0e30be27-2357-37a4-b073-c4aeba44d3c8}">
+        <p14:section name="5.4 State Spaces and Configurations" id="{ec6915a2-d083-bc65-fe07-d9f0fe7fdd2d}">
           <p14:sldIdLst>
             <p14:sldId id="264"/>
           </p14:sldIdLst>
         </p14:section>
-        <p14:section name="5.5 Trajectories and Transitions" id="{a29cc122-060b-cce2-1fbc-ff631f964f58}">
+        <p14:section name="5.5 Trajectories and Transitions" id="{d41489b0-1c2f-4914-83cc-b25b4489a9cc}">
           <p14:sldIdLst>
             <p14:sldId id="265"/>
           </p14:sldIdLst>
         </p14:section>
-        <p14:section name="5.6 Equilibrium States" id="{42909a10-1c26-1150-0715-55ac2435ba2a}">
+        <p14:section name="5.6 Equilibrium States" id="{0456ac09-f74a-4eac-9f2f-67e18d5bea43}">
           <p14:sldIdLst>
             <p14:sldId id="266"/>
             <p14:sldId id="267"/>
           </p14:sldIdLst>
         </p14:section>
-        <p14:section name="5.7 Feasible Regions" id="{05e56541-42c5-5f70-3907-2f3524759a6b}">
+        <p14:section name="5.7 Feasible Regions" id="{e4980262-8498-32e4-06dd-743bca8a0032}">
           <p14:sldIdLst>
             <p14:sldId id="268"/>
             <p14:sldId id="269"/>
           </p14:sldIdLst>
         </p14:section>
-        <p14:section name="5.8 Dimension and Visualization" id="{59ae970f-1f22-225e-d5e7-0bb7ce79cb4b}">
+        <p14:section name="5.8 Dimension and Visualization" id="{2ccdf533-8dd7-b379-14f6-fedc02fb50f0}">
           <p14:sldIdLst>
             <p14:sldId id="270"/>
           </p14:sldIdLst>
         </p14:section>
-        <p14:section name="Worked Example 5.1" id="{7285bb37-0735-27a9-87fe-b7259536781a}">
+        <p14:section name="Worked Example 5.1" id="{11044c1d-bb12-a056-499a-594347faee64}">
           <p14:sldIdLst>
             <p14:sldId id="271"/>
             <p14:sldId id="272"/>
@@ -190,12 +190,12 @@
             <p14:sldId id="275"/>
           </p14:sldIdLst>
         </p14:section>
-        <p14:section name="AXIOM Lab 1.5" id="{a844e875-6ccf-e873-3111-a6a404899f44}">
+        <p14:section name="AXIOM Lab 1.5" id="{b62291d4-be5f-7548-be1c-23dc4c342466}">
           <p14:sldIdLst>
             <p14:sldId id="276"/>
           </p14:sldIdLst>
         </p14:section>
-        <p14:section name="Close" id="{b0decd00-bb08-b037-f2d2-d3c130716b14}">
+        <p14:section name="Close" id="{cd83399b-bdc4-a147-e5c4-5ec6579980c1}">
           <p14:sldIdLst>
             <p14:sldId id="277"/>
             <p14:sldId id="278"/>

--- a/downloads/DCT_V1_Ch05_Slides.pptx
+++ b/downloads/DCT_V1_Ch05_Slides.pptx
@@ -130,7 +130,7 @@
   <p:extLst>
     <p:ext uri="{521415D9-36F7-43E2-AB2F-B90AF26B5E84}">
       <p14:sectionLst xmlns:p14="http://schemas.microsoft.com/office/powerpoint/2010/main">
-        <p14:section name="Opening" id="{949eb8d2-e960-e215-a3cb-8aba50249e7e}">
+        <p14:section name="Opening" id="{23b51653-834c-b284-22e2-67defc608d0b}">
           <p14:sldIdLst>
             <p14:sldId id="256"/>
             <p14:sldId id="257"/>
@@ -138,50 +138,50 @@
             <p14:sldId id="259"/>
           </p14:sldIdLst>
         </p14:section>
-        <p14:section name="5.1 Why the State Needs a Foundation" id="{89e5b88b-5662-1d94-0044-527ceb5a2e73}">
+        <p14:section name="5.1 Why the State Needs a Foundation" id="{cdcc74d3-2d80-e862-8fdc-e4f526052bab}">
           <p14:sldIdLst>
             <p14:sldId id="260"/>
           </p14:sldIdLst>
         </p14:section>
-        <p14:section name="5.2 The Minimal State" id="{96327524-193c-02b7-346d-552e789d49cd}">
+        <p14:section name="5.2 The Minimal State" id="{85dbf3ee-96f0-902f-3adc-77cab52b2d00}">
           <p14:sldIdLst>
             <p14:sldId id="261"/>
           </p14:sldIdLst>
         </p14:section>
-        <p14:section name="5.3 State Variables and Parameters" id="{9f4c1081-7e29-f4ec-b6ab-ef43f3fff9df}">
+        <p14:section name="5.3 State Variables and Parameters" id="{218242d1-b2b8-87e3-ae36-cbd52f5b75c8}">
           <p14:sldIdLst>
             <p14:sldId id="262"/>
             <p14:sldId id="263"/>
           </p14:sldIdLst>
         </p14:section>
-        <p14:section name="5.4 State Spaces and Configurations" id="{ec6915a2-d083-bc65-fe07-d9f0fe7fdd2d}">
+        <p14:section name="5.4 State Spaces and Configurations" id="{58fecf30-2987-a8be-29f2-67e1f115417d}">
           <p14:sldIdLst>
             <p14:sldId id="264"/>
           </p14:sldIdLst>
         </p14:section>
-        <p14:section name="5.5 Trajectories and Transitions" id="{d41489b0-1c2f-4914-83cc-b25b4489a9cc}">
+        <p14:section name="5.5 Trajectories and Transitions" id="{8b798bbf-8a8e-4e81-bd24-3130e996c8c6}">
           <p14:sldIdLst>
             <p14:sldId id="265"/>
           </p14:sldIdLst>
         </p14:section>
-        <p14:section name="5.6 Equilibrium States" id="{0456ac09-f74a-4eac-9f2f-67e18d5bea43}">
+        <p14:section name="5.6 Equilibrium States" id="{a32e5611-8b65-b2c7-f60e-9942f154e7a1}">
           <p14:sldIdLst>
             <p14:sldId id="266"/>
             <p14:sldId id="267"/>
           </p14:sldIdLst>
         </p14:section>
-        <p14:section name="5.7 Feasible Regions" id="{e4980262-8498-32e4-06dd-743bca8a0032}">
+        <p14:section name="5.7 Feasible Regions" id="{54f86ddb-623e-1d9f-e306-3877e5ac4f2b}">
           <p14:sldIdLst>
             <p14:sldId id="268"/>
             <p14:sldId id="269"/>
           </p14:sldIdLst>
         </p14:section>
-        <p14:section name="5.8 Dimension and Visualization" id="{2ccdf533-8dd7-b379-14f6-fedc02fb50f0}">
+        <p14:section name="5.8 Dimension and Visualization" id="{596a9068-d840-e547-85fa-f1020ef4720c}">
           <p14:sldIdLst>
             <p14:sldId id="270"/>
           </p14:sldIdLst>
         </p14:section>
-        <p14:section name="Worked Example 5.1" id="{11044c1d-bb12-a056-499a-594347faee64}">
+        <p14:section name="Worked Example 5.1" id="{683fdd72-4fa6-1ec0-6dbb-b01cd6cf48c8}">
           <p14:sldIdLst>
             <p14:sldId id="271"/>
             <p14:sldId id="272"/>
@@ -190,12 +190,12 @@
             <p14:sldId id="275"/>
           </p14:sldIdLst>
         </p14:section>
-        <p14:section name="AXIOM Lab 1.5" id="{b62291d4-be5f-7548-be1c-23dc4c342466}">
+        <p14:section name="AXIOM Lab 1.5" id="{dea5a977-b45e-9d22-f3fc-4b013958c65e}">
           <p14:sldIdLst>
             <p14:sldId id="276"/>
           </p14:sldIdLst>
         </p14:section>
-        <p14:section name="Close" id="{cd83399b-bdc4-a147-e5c4-5ec6579980c1}">
+        <p14:section name="Close" id="{b420fde6-9458-c665-2c65-1c7865e471d6}">
           <p14:sldIdLst>
             <p14:sldId id="277"/>
             <p14:sldId id="278"/>
